--- a/簡報/A1海報_三聯幅.pptx
+++ b/簡報/A1海報_三聯幅.pptx
@@ -3643,7 +3643,7 @@
                 <a:ea typeface="微軟正黑體"/>
                 <a:cs typeface="微軟正黑體"/>
               </a:rPr>
-              <a:t>22 億人</a:t>
+              <a:t>17 億+</a:t>
             </a:r>
           </a:p>
         </p:txBody>
@@ -3687,7 +3687,7 @@
                 <a:ea typeface="微軟正黑體"/>
                 <a:cs typeface="微軟正黑體"/>
               </a:rPr>
-              <a:t>全球佛道印信仰人口</a:t>
+              <a:t>印度教＋佛教信仰人口</a:t>
             </a:r>
           </a:p>
           <a:p>
@@ -3708,7 +3708,7 @@
                 <a:ea typeface="微軟正黑體"/>
                 <a:cs typeface="微軟正黑體"/>
               </a:rPr>
-              <a:t>焚香是跨文明共同儀式核心</a:t>
+              <a:t>道教與民間信仰另計・跨文明儀式</a:t>
             </a:r>
           </a:p>
         </p:txBody>
